--- a/JPWP.pptx
+++ b/JPWP.pptx
@@ -142,15 +142,6 @@
     </a:lvl9pPr>
   </p:defaultTextStyle>
 </p:presentation>
-</file>
-
-<file path=ppt/revisionInfo.xml><?xml version="1.0" encoding="utf-8"?>
-<p1510:revInfo xmlns:a="http://schemas.openxmlformats.org/drawingml/2006/main" xmlns:r="http://schemas.openxmlformats.org/officeDocument/2006/relationships" xmlns:p1510="http://schemas.microsoft.com/office/powerpoint/2015/10/main">
-  <p1510:revLst>
-    <p1510:client id="{33443E6E-B0E2-8693-4A35-E934F11F725F}" v="477" dt="2026-03-24T20:06:44.591"/>
-    <p1510:client id="{B5BFC523-390B-464F-952D-80A089B0F3D0}" v="152" dt="2026-03-24T20:26:13.359"/>
-  </p1510:revLst>
-</p1510:revInfo>
 </file>
 
 <file path=ppt/diagrams/colors1.xml><?xml version="1.0" encoding="utf-8"?>
@@ -21405,7 +21396,7 @@
               <a:tabLst/>
             </a:pPr>
             <a:r>
-              <a:rPr kumimoji="0" lang="pl-PL" altLang="pl-PL" b="0" i="0" u="none" strike="noStrike" cap="none" normalizeH="0" baseline="0">
+              <a:rPr kumimoji="0" lang="pl-PL" altLang="pl-PL" b="0" i="0" u="none" strike="noStrike" cap="none" normalizeH="0" baseline="0" dirty="0">
                 <a:ln>
                   <a:noFill/>
                 </a:ln>
@@ -21414,7 +21405,7 @@
               </a:rPr>
               <a:t>Część Praktyczna – Warsztaty na GitHubie </a:t>
             </a:r>
-            <a:endParaRPr kumimoji="0" lang="pl-PL" altLang="pl-PL" b="0" i="0" u="none" strike="noStrike" cap="none" normalizeH="0" baseline="0">
+            <a:endParaRPr kumimoji="0" lang="pl-PL" altLang="pl-PL" b="0" i="0" u="none" strike="noStrike" cap="none" normalizeH="0" baseline="0" dirty="0">
               <a:ln>
                 <a:noFill/>
               </a:ln>
@@ -21499,7 +21490,7 @@
               <a:tabLst/>
             </a:pPr>
             <a:r>
-              <a:rPr kumimoji="0" lang="pl-PL" altLang="pl-PL" b="0" i="0" u="none" strike="noStrike" cap="none" normalizeH="0" baseline="0">
+              <a:rPr kumimoji="0" lang="pl-PL" altLang="pl-PL" b="0" i="0" u="none" strike="noStrike" cap="none" normalizeH="0" baseline="0" dirty="0">
                 <a:ln>
                   <a:noFill/>
                 </a:ln>
@@ -21509,7 +21500,7 @@
               <a:t>Zadanie: </a:t>
             </a:r>
             <a:r>
-              <a:rPr kumimoji="0" lang="pl-PL" altLang="pl-PL" b="0" i="0" u="none" strike="noStrike" cap="none" normalizeH="0" baseline="0" err="1">
+              <a:rPr kumimoji="0" lang="pl-PL" altLang="pl-PL" b="0" i="0" u="none" strike="noStrike" cap="none" normalizeH="0" baseline="0" dirty="0" err="1">
                 <a:ln>
                   <a:noFill/>
                 </a:ln>
@@ -21519,7 +21510,7 @@
               <a:t>Refaktoryzacja</a:t>
             </a:r>
             <a:r>
-              <a:rPr kumimoji="0" lang="pl-PL" altLang="pl-PL" b="0" i="0" u="none" strike="noStrike" cap="none" normalizeH="0" baseline="0">
+              <a:rPr kumimoji="0" lang="pl-PL" altLang="pl-PL" b="0" i="0" u="none" strike="noStrike" cap="none" normalizeH="0" baseline="0" dirty="0">
                 <a:ln>
                   <a:noFill/>
                 </a:ln>
@@ -21529,7 +21520,7 @@
               <a:t> "brudnego" kodu imperatywnego na czysty kod funkcyjny w </a:t>
             </a:r>
             <a:r>
-              <a:rPr kumimoji="0" lang="pl-PL" altLang="pl-PL" b="0" i="0" u="none" strike="noStrike" cap="none" normalizeH="0" baseline="0" err="1">
+              <a:rPr kumimoji="0" lang="pl-PL" altLang="pl-PL" b="0" i="0" u="none" strike="noStrike" cap="none" normalizeH="0" baseline="0" dirty="0" err="1">
                 <a:ln>
                   <a:noFill/>
                 </a:ln>
@@ -21539,7 +21530,7 @@
               <a:t>Pythonie</a:t>
             </a:r>
             <a:r>
-              <a:rPr kumimoji="0" lang="pl-PL" altLang="pl-PL" b="0" i="0" u="none" strike="noStrike" cap="none" normalizeH="0" baseline="0">
+              <a:rPr kumimoji="0" lang="pl-PL" altLang="pl-PL" b="0" i="0" u="none" strike="noStrike" cap="none" normalizeH="0" baseline="0" dirty="0">
                 <a:ln>
                   <a:noFill/>
                 </a:ln>
@@ -21548,6 +21539,13 @@
               </a:rPr>
               <a:t>.</a:t>
             </a:r>
+            <a:endParaRPr kumimoji="0" lang="en-US" altLang="pl-PL" b="0" i="0" u="none" strike="noStrike" cap="none" normalizeH="0" baseline="0" dirty="0">
+              <a:ln>
+                <a:noFill/>
+              </a:ln>
+              <a:effectLst/>
+              <a:latin typeface="Arial" panose="020B0604020202020204" pitchFamily="34" charset="0"/>
+            </a:endParaRPr>
           </a:p>
           <a:p>
             <a:pPr marL="0" marR="0" lvl="0" indent="0" defTabSz="914400" rtl="0" eaLnBrk="0" fontAlgn="base" latinLnBrk="0" hangingPunct="0">
@@ -21563,62 +21561,24 @@
               <a:tabLst/>
             </a:pPr>
             <a:r>
-              <a:rPr kumimoji="0" lang="pl-PL" altLang="pl-PL" b="1" i="0" u="none" strike="noStrike" cap="none" normalizeH="0" baseline="0">
+              <a:rPr kumimoji="0" lang="pl-PL" altLang="pl-PL" b="0" i="0" u="none" strike="noStrike" cap="none" normalizeH="0" baseline="0" dirty="0">
                 <a:ln>
                   <a:noFill/>
                 </a:ln>
                 <a:effectLst/>
                 <a:latin typeface="Arial" panose="020B0604020202020204" pitchFamily="34" charset="0"/>
               </a:rPr>
-              <a:t>Kroki:</a:t>
-            </a:r>
-            <a:endParaRPr kumimoji="0" lang="pl-PL" altLang="pl-PL" b="0" i="0" u="none" strike="noStrike" cap="none" normalizeH="0" baseline="0">
-              <a:ln>
-                <a:noFill/>
-              </a:ln>
-              <a:effectLst/>
-              <a:latin typeface="Arial" panose="020B0604020202020204" pitchFamily="34" charset="0"/>
-            </a:endParaRPr>
-          </a:p>
-          <a:p>
-            <a:pPr marL="0" lvl="0" indent="0" eaLnBrk="0" fontAlgn="base" hangingPunct="0">
-              <a:spcBef>
-                <a:spcPct val="0"/>
-              </a:spcBef>
-              <a:spcAft>
-                <a:spcPts val="600"/>
-              </a:spcAft>
-              <a:buNone/>
-            </a:pPr>
-            <a:r>
-              <a:rPr kumimoji="0" lang="en-US" altLang="pl-PL" b="0" i="0" u="none" strike="noStrike" cap="none" normalizeH="0" baseline="0">
-                <a:ln>
-                  <a:noFill/>
-                </a:ln>
+              <a:t>Wejdźcie na: </a:t>
+            </a:r>
+            <a:r>
+              <a:rPr lang="pl-PL" altLang="pl-PL" dirty="0">
                 <a:effectLst/>
                 <a:latin typeface="Arial" panose="020B0604020202020204" pitchFamily="34" charset="0"/>
               </a:rPr>
-              <a:t>1.</a:t>
-            </a:r>
-            <a:r>
-              <a:rPr kumimoji="0" lang="pl-PL" altLang="pl-PL" b="0" i="0" u="none" strike="noStrike" cap="none" normalizeH="0" baseline="0">
-                <a:ln>
-                  <a:noFill/>
-                </a:ln>
-                <a:effectLst/>
-                <a:latin typeface="Arial" panose="020B0604020202020204" pitchFamily="34" charset="0"/>
-              </a:rPr>
-              <a:t>Wejdźcie na: </a:t>
-            </a:r>
-            <a:r>
-              <a:rPr lang="pl-PL" altLang="pl-PL">
-                <a:effectLst/>
-                <a:latin typeface="Arial" panose="020B0604020202020204" pitchFamily="34" charset="0"/>
-              </a:rPr>
               <a:t>https://github.com/wowerro67/JPWP Skopiujcie </a:t>
             </a:r>
             <a:r>
-              <a:rPr kumimoji="0" lang="pl-PL" altLang="pl-PL" b="0" i="0" u="none" strike="noStrike" cap="none" normalizeH="0" baseline="0">
+              <a:rPr kumimoji="0" lang="pl-PL" altLang="pl-PL" b="0" i="0" u="none" strike="noStrike" cap="none" normalizeH="0" baseline="0" dirty="0">
                 <a:ln>
                   <a:noFill/>
                 </a:ln>
@@ -21642,45 +21602,51 @@
               <a:tabLst/>
             </a:pPr>
             <a:r>
-              <a:rPr kumimoji="0" lang="en-US" altLang="pl-PL" b="0" i="0" u="none" strike="noStrike" cap="none" normalizeH="0" baseline="0">
+              <a:rPr kumimoji="0" lang="pl-PL" altLang="pl-PL" b="0" i="0" u="none" strike="noStrike" cap="none" normalizeH="0" baseline="0" dirty="0">
                 <a:ln>
                   <a:noFill/>
                 </a:ln>
                 <a:effectLst/>
                 <a:latin typeface="Arial" panose="020B0604020202020204" pitchFamily="34" charset="0"/>
               </a:rPr>
-              <a:t>2.</a:t>
-            </a:r>
-            <a:r>
-              <a:rPr kumimoji="0" lang="pl-PL" altLang="pl-PL" b="0" i="0" u="none" strike="noStrike" cap="none" normalizeH="0" baseline="0">
-                <a:ln>
-                  <a:noFill/>
-                </a:ln>
+              <a:t>Szukajcie komentarzy</a:t>
+            </a:r>
+            <a:r>
+              <a:rPr lang="en-US" altLang="pl-PL" dirty="0">
                 <a:effectLst/>
                 <a:latin typeface="Arial" panose="020B0604020202020204" pitchFamily="34" charset="0"/>
               </a:rPr>
-              <a:t>Szukajcie komentarzy: </a:t>
-            </a:r>
-            <a:r>
-              <a:rPr kumimoji="0" lang="pl-PL" altLang="pl-PL" b="0" i="0" u="none" strike="noStrike" cap="none" normalizeH="0" baseline="0">
-                <a:ln>
-                  <a:noFill/>
-                </a:ln>
+              <a:t> z </a:t>
+            </a:r>
+            <a:r>
+              <a:rPr lang="en-US" altLang="pl-PL" dirty="0" err="1">
                 <a:effectLst/>
-                <a:latin typeface="Arial Unicode MS" panose="020B0604020202020204" pitchFamily="34" charset="-128"/>
-              </a:rPr>
-              <a:t># TODO: Zamień na podejście funkcyjne</a:t>
-            </a:r>
-            <a:r>
-              <a:rPr kumimoji="0" lang="pl-PL" altLang="pl-PL" b="0" i="0" u="none" strike="noStrike" cap="none" normalizeH="0" baseline="0">
-                <a:ln>
-                  <a:noFill/>
-                </a:ln>
+                <a:latin typeface="Arial" panose="020B0604020202020204" pitchFamily="34" charset="0"/>
+              </a:rPr>
+              <a:t>poleceniami</a:t>
+            </a:r>
+            <a:r>
+              <a:rPr lang="en-US" altLang="pl-PL" dirty="0">
                 <a:effectLst/>
+                <a:latin typeface="Arial" panose="020B0604020202020204" pitchFamily="34" charset="0"/>
+              </a:rPr>
+              <a:t> do </a:t>
+            </a:r>
+            <a:r>
+              <a:rPr lang="en-US" altLang="pl-PL" dirty="0" err="1">
+                <a:effectLst/>
+                <a:latin typeface="Arial" panose="020B0604020202020204" pitchFamily="34" charset="0"/>
+              </a:rPr>
+              <a:t>zadań</a:t>
+            </a:r>
+            <a:r>
+              <a:rPr lang="en-US" altLang="pl-PL" dirty="0">
+                <a:effectLst/>
+                <a:latin typeface="Arial" panose="020B0604020202020204" pitchFamily="34" charset="0"/>
               </a:rPr>
               <a:t>.</a:t>
             </a:r>
-            <a:endParaRPr kumimoji="0" lang="pl-PL" altLang="pl-PL" b="0" i="0" u="none" strike="noStrike" cap="none" normalizeH="0" baseline="0">
+            <a:endParaRPr kumimoji="0" lang="pl-PL" altLang="pl-PL" b="0" i="0" u="none" strike="noStrike" cap="none" normalizeH="0" baseline="0" dirty="0">
               <a:ln>
                 <a:noFill/>
               </a:ln>

--- a/JPWP.pptx
+++ b/JPWP.pptx
@@ -11416,36 +11416,6 @@
           </a:p>
         </p:txBody>
       </p:sp>
-      <p:pic>
-        <p:nvPicPr>
-          <p:cNvPr id="7" name="Obraz 6">
-            <a:extLst>
-              <a:ext uri="{FF2B5EF4-FFF2-40B4-BE49-F238E27FC236}">
-                <a16:creationId xmlns:a16="http://schemas.microsoft.com/office/drawing/2014/main" id="{B4B87370-C87D-C997-B39F-809DACC03A31}"/>
-              </a:ext>
-            </a:extLst>
-          </p:cNvPr>
-          <p:cNvPicPr>
-            <a:picLocks noChangeAspect="1"/>
-          </p:cNvPicPr>
-          <p:nvPr/>
-        </p:nvPicPr>
-        <p:blipFill>
-          <a:blip r:embed="rId3"/>
-          <a:stretch>
-            <a:fillRect/>
-          </a:stretch>
-        </p:blipFill>
-        <p:spPr>
-          <a:xfrm>
-            <a:off x="1415452" y="1151910"/>
-            <a:ext cx="5393579" cy="4584542"/>
-          </a:xfrm>
-          <a:prstGeom prst="rect">
-            <a:avLst/>
-          </a:prstGeom>
-        </p:spPr>
-      </p:pic>
       <p:sp>
         <p:nvSpPr>
           <p:cNvPr id="5" name="Symbol zastępczy stopki 4">
@@ -11657,6 +11627,36 @@
           </a:p>
         </p:txBody>
       </p:sp>
+      <p:pic>
+        <p:nvPicPr>
+          <p:cNvPr id="4" name="Obraz 3">
+            <a:extLst>
+              <a:ext uri="{FF2B5EF4-FFF2-40B4-BE49-F238E27FC236}">
+                <a16:creationId xmlns:a16="http://schemas.microsoft.com/office/drawing/2014/main" id="{0E871199-EC5D-927B-2228-65CBCA9054BE}"/>
+              </a:ext>
+            </a:extLst>
+          </p:cNvPr>
+          <p:cNvPicPr>
+            <a:picLocks noChangeAspect="1"/>
+          </p:cNvPicPr>
+          <p:nvPr/>
+        </p:nvPicPr>
+        <p:blipFill>
+          <a:blip r:embed="rId3"/>
+          <a:stretch>
+            <a:fillRect/>
+          </a:stretch>
+        </p:blipFill>
+        <p:spPr>
+          <a:xfrm>
+            <a:off x="1174160" y="969881"/>
+            <a:ext cx="5852703" cy="4918238"/>
+          </a:xfrm>
+          <a:prstGeom prst="rect">
+            <a:avLst/>
+          </a:prstGeom>
+        </p:spPr>
+      </p:pic>
     </p:spTree>
     <p:extLst>
       <p:ext uri="{BB962C8B-B14F-4D97-AF65-F5344CB8AC3E}">
